--- a/Documentation and PPT/Movie-booking (1).pptx
+++ b/Documentation and PPT/Movie-booking (1).pptx
@@ -262,7 +262,7 @@
           <a:p>
             <a:fld id="{DACDECC7-2B92-49EA-A87A-CDB0E892FBD9}" type="datetimeFigureOut">
               <a:rPr lang="en-IN" smtClean="0"/>
-              <a:t>28-11-2025</a:t>
+              <a:t>20-04-2026</a:t>
             </a:fld>
             <a:endParaRPr lang="en-IN"/>
           </a:p>
@@ -432,7 +432,7 @@
           <a:p>
             <a:fld id="{DACDECC7-2B92-49EA-A87A-CDB0E892FBD9}" type="datetimeFigureOut">
               <a:rPr lang="en-IN" smtClean="0"/>
-              <a:t>28-11-2025</a:t>
+              <a:t>20-04-2026</a:t>
             </a:fld>
             <a:endParaRPr lang="en-IN"/>
           </a:p>
@@ -612,7 +612,7 @@
           <a:p>
             <a:fld id="{DACDECC7-2B92-49EA-A87A-CDB0E892FBD9}" type="datetimeFigureOut">
               <a:rPr lang="en-IN" smtClean="0"/>
-              <a:t>28-11-2025</a:t>
+              <a:t>20-04-2026</a:t>
             </a:fld>
             <a:endParaRPr lang="en-IN"/>
           </a:p>
@@ -782,7 +782,7 @@
           <a:p>
             <a:fld id="{DACDECC7-2B92-49EA-A87A-CDB0E892FBD9}" type="datetimeFigureOut">
               <a:rPr lang="en-IN" smtClean="0"/>
-              <a:t>28-11-2025</a:t>
+              <a:t>20-04-2026</a:t>
             </a:fld>
             <a:endParaRPr lang="en-IN"/>
           </a:p>
@@ -1028,7 +1028,7 @@
           <a:p>
             <a:fld id="{DACDECC7-2B92-49EA-A87A-CDB0E892FBD9}" type="datetimeFigureOut">
               <a:rPr lang="en-IN" smtClean="0"/>
-              <a:t>28-11-2025</a:t>
+              <a:t>20-04-2026</a:t>
             </a:fld>
             <a:endParaRPr lang="en-IN"/>
           </a:p>
@@ -1260,7 +1260,7 @@
           <a:p>
             <a:fld id="{DACDECC7-2B92-49EA-A87A-CDB0E892FBD9}" type="datetimeFigureOut">
               <a:rPr lang="en-IN" smtClean="0"/>
-              <a:t>28-11-2025</a:t>
+              <a:t>20-04-2026</a:t>
             </a:fld>
             <a:endParaRPr lang="en-IN"/>
           </a:p>
@@ -1627,7 +1627,7 @@
           <a:p>
             <a:fld id="{DACDECC7-2B92-49EA-A87A-CDB0E892FBD9}" type="datetimeFigureOut">
               <a:rPr lang="en-IN" smtClean="0"/>
-              <a:t>28-11-2025</a:t>
+              <a:t>20-04-2026</a:t>
             </a:fld>
             <a:endParaRPr lang="en-IN"/>
           </a:p>
@@ -1745,7 +1745,7 @@
           <a:p>
             <a:fld id="{DACDECC7-2B92-49EA-A87A-CDB0E892FBD9}" type="datetimeFigureOut">
               <a:rPr lang="en-IN" smtClean="0"/>
-              <a:t>28-11-2025</a:t>
+              <a:t>20-04-2026</a:t>
             </a:fld>
             <a:endParaRPr lang="en-IN"/>
           </a:p>
@@ -1840,7 +1840,7 @@
           <a:p>
             <a:fld id="{DACDECC7-2B92-49EA-A87A-CDB0E892FBD9}" type="datetimeFigureOut">
               <a:rPr lang="en-IN" smtClean="0"/>
-              <a:t>28-11-2025</a:t>
+              <a:t>20-04-2026</a:t>
             </a:fld>
             <a:endParaRPr lang="en-IN"/>
           </a:p>
@@ -2117,7 +2117,7 @@
           <a:p>
             <a:fld id="{DACDECC7-2B92-49EA-A87A-CDB0E892FBD9}" type="datetimeFigureOut">
               <a:rPr lang="en-IN" smtClean="0"/>
-              <a:t>28-11-2025</a:t>
+              <a:t>20-04-2026</a:t>
             </a:fld>
             <a:endParaRPr lang="en-IN"/>
           </a:p>
@@ -2370,7 +2370,7 @@
           <a:p>
             <a:fld id="{DACDECC7-2B92-49EA-A87A-CDB0E892FBD9}" type="datetimeFigureOut">
               <a:rPr lang="en-IN" smtClean="0"/>
-              <a:t>28-11-2025</a:t>
+              <a:t>20-04-2026</a:t>
             </a:fld>
             <a:endParaRPr lang="en-IN"/>
           </a:p>
@@ -2597,7 +2597,7 @@
           <a:p>
             <a:fld id="{DACDECC7-2B92-49EA-A87A-CDB0E892FBD9}" type="datetimeFigureOut">
               <a:rPr lang="en-IN" smtClean="0"/>
-              <a:t>28-11-2025</a:t>
+              <a:t>20-04-2026</a:t>
             </a:fld>
             <a:endParaRPr lang="en-IN"/>
           </a:p>
@@ -3014,7 +3014,7 @@
         </p:nvSpPr>
         <p:spPr>
           <a:xfrm>
-            <a:off x="1070587" y="2586919"/>
+            <a:off x="1045567" y="1399564"/>
             <a:ext cx="10515600" cy="1325563"/>
           </a:xfrm>
         </p:spPr>
@@ -3042,6 +3042,153 @@
               <a:solidFill>
                 <a:schemeClr val="accent4"/>
               </a:solidFill>
+            </a:endParaRPr>
+          </a:p>
+        </p:txBody>
+      </p:sp>
+      <p:sp>
+        <p:nvSpPr>
+          <p:cNvPr id="2" name="Title 3">
+            <a:extLst>
+              <a:ext uri="{FF2B5EF4-FFF2-40B4-BE49-F238E27FC236}">
+                <a16:creationId xmlns:a16="http://schemas.microsoft.com/office/drawing/2014/main" id="{CA3D0195-B15F-B152-D5C2-6C46B508A7B7}"/>
+              </a:ext>
+            </a:extLst>
+          </p:cNvPr>
+          <p:cNvSpPr txBox="1">
+            <a:spLocks/>
+          </p:cNvSpPr>
+          <p:nvPr/>
+        </p:nvSpPr>
+        <p:spPr>
+          <a:xfrm>
+            <a:off x="838200" y="3627907"/>
+            <a:ext cx="10515600" cy="1992574"/>
+          </a:xfrm>
+          <a:prstGeom prst="rect">
+            <a:avLst/>
+          </a:prstGeom>
+        </p:spPr>
+        <p:txBody>
+          <a:bodyPr vert="horz" lIns="91440" tIns="45720" rIns="91440" bIns="45720" rtlCol="0" anchor="ctr">
+            <a:noAutofit/>
+          </a:bodyPr>
+          <a:lstStyle>
+            <a:lvl1pPr algn="l" defTabSz="914400" rtl="0" eaLnBrk="1" latinLnBrk="0" hangingPunct="1">
+              <a:lnSpc>
+                <a:spcPct val="90000"/>
+              </a:lnSpc>
+              <a:spcBef>
+                <a:spcPct val="0"/>
+              </a:spcBef>
+              <a:buNone/>
+              <a:defRPr sz="4400" kern="1200">
+                <a:solidFill>
+                  <a:schemeClr val="tx1"/>
+                </a:solidFill>
+                <a:latin typeface="+mj-lt"/>
+                <a:ea typeface="+mj-ea"/>
+                <a:cs typeface="+mj-cs"/>
+              </a:defRPr>
+            </a:lvl1pPr>
+          </a:lstStyle>
+          <a:p>
+            <a:pPr algn="ctr">
+              <a:lnSpc>
+                <a:spcPct val="150000"/>
+              </a:lnSpc>
+            </a:pPr>
+            <a:r>
+              <a:rPr lang="en-US" sz="2400" b="1" dirty="0">
+                <a:solidFill>
+                  <a:srgbClr val="00B0F0"/>
+                </a:solidFill>
+                <a:latin typeface="Roboto"/>
+              </a:rPr>
+              <a:t>Group Members :</a:t>
+            </a:r>
+          </a:p>
+          <a:p>
+            <a:pPr algn="ctr">
+              <a:lnSpc>
+                <a:spcPct val="150000"/>
+              </a:lnSpc>
+            </a:pPr>
+            <a:endParaRPr lang="en-US" sz="2400" b="1" dirty="0">
+              <a:solidFill>
+                <a:srgbClr val="00B0F0"/>
+              </a:solidFill>
+              <a:latin typeface="Roboto"/>
+            </a:endParaRPr>
+          </a:p>
+          <a:p>
+            <a:pPr algn="ctr">
+              <a:lnSpc>
+                <a:spcPct val="150000"/>
+              </a:lnSpc>
+            </a:pPr>
+            <a:r>
+              <a:rPr lang="en-US" sz="2000" b="1" i="1" dirty="0">
+                <a:solidFill>
+                  <a:schemeClr val="accent3">
+                    <a:lumMod val="20000"/>
+                    <a:lumOff val="80000"/>
+                  </a:schemeClr>
+                </a:solidFill>
+                <a:latin typeface="Roboto"/>
+              </a:rPr>
+              <a:t>Yogesh Satish Badgujar - 3805</a:t>
+            </a:r>
+          </a:p>
+          <a:p>
+            <a:pPr algn="ctr">
+              <a:lnSpc>
+                <a:spcPct val="150000"/>
+              </a:lnSpc>
+            </a:pPr>
+            <a:r>
+              <a:rPr lang="en-US" sz="2000" b="1" i="1" dirty="0">
+                <a:solidFill>
+                  <a:schemeClr val="accent3">
+                    <a:lumMod val="20000"/>
+                    <a:lumOff val="80000"/>
+                  </a:schemeClr>
+                </a:solidFill>
+                <a:latin typeface="Roboto"/>
+              </a:rPr>
+              <a:t>Krish Gulab Patil - 3976</a:t>
+            </a:r>
+          </a:p>
+          <a:p>
+            <a:pPr algn="ctr">
+              <a:lnSpc>
+                <a:spcPct val="150000"/>
+              </a:lnSpc>
+            </a:pPr>
+            <a:r>
+              <a:rPr lang="en-US" sz="2000" b="1" i="1" dirty="0">
+                <a:solidFill>
+                  <a:schemeClr val="accent3">
+                    <a:lumMod val="20000"/>
+                    <a:lumOff val="80000"/>
+                  </a:schemeClr>
+                </a:solidFill>
+                <a:latin typeface="Roboto"/>
+              </a:rPr>
+              <a:t>Vishal Prabhakar Patil - 3997</a:t>
+            </a:r>
+          </a:p>
+          <a:p>
+            <a:pPr algn="ctr">
+              <a:lnSpc>
+                <a:spcPct val="150000"/>
+              </a:lnSpc>
+            </a:pPr>
+            <a:endParaRPr lang="en-US" sz="3600" b="1" dirty="0">
+              <a:solidFill>
+                <a:schemeClr val="accent4"/>
+              </a:solidFill>
+              <a:latin typeface="Roboto"/>
             </a:endParaRPr>
           </a:p>
         </p:txBody>
@@ -3813,6 +3960,21 @@
                 <a:latin typeface="Roboto regular"/>
               </a:rPr>
               <a:t>Book Movies</a:t>
+            </a:r>
+          </a:p>
+          <a:p>
+            <a:pPr lvl="0">
+              <a:lnSpc>
+                <a:spcPct val="150000"/>
+              </a:lnSpc>
+              <a:buFont typeface="Wingdings" panose="05000000000000000000" pitchFamily="2" charset="2"/>
+              <a:buChar char="Ø"/>
+            </a:pPr>
+            <a:r>
+              <a:rPr lang="en-US" sz="1600" dirty="0">
+                <a:latin typeface="Roboto regular"/>
+              </a:rPr>
+              <a:t>After Booking Showing Notification</a:t>
             </a:r>
             <a:endParaRPr lang="en-IN" sz="1600" dirty="0">
               <a:latin typeface="Roboto regular"/>
@@ -4732,7 +4894,7 @@
               <a:rPr lang="en-IN" sz="1600" dirty="0">
                 <a:latin typeface="RobotoRegular"/>
               </a:rPr>
-              <a:t>In Future work, This application to develop a cross platforms like IOS, etc.</a:t>
+              <a:t>In Future work, This application to develop a cross platforms like IOS, Android etc.</a:t>
             </a:r>
           </a:p>
           <a:p>
@@ -4778,6 +4940,63 @@
                 <a:latin typeface="RobotoRegular"/>
               </a:rPr>
               <a:t>To restrict the usage of all files by the users based on their privileges on the system</a:t>
+            </a:r>
+          </a:p>
+          <a:p>
+            <a:pPr algn="just">
+              <a:lnSpc>
+                <a:spcPct val="150000"/>
+              </a:lnSpc>
+              <a:buFont typeface="Wingdings" panose="05000000000000000000" pitchFamily="2" charset="2"/>
+              <a:buChar char="Ø"/>
+            </a:pPr>
+            <a:r>
+              <a:rPr lang="en-US" sz="1600" dirty="0">
+                <a:latin typeface="RobotoRegular"/>
+              </a:rPr>
+              <a:t>Implemented Map System in UI.</a:t>
+            </a:r>
+          </a:p>
+          <a:p>
+            <a:pPr algn="just">
+              <a:lnSpc>
+                <a:spcPct val="150000"/>
+              </a:lnSpc>
+              <a:buFont typeface="Wingdings" panose="05000000000000000000" pitchFamily="2" charset="2"/>
+              <a:buChar char="Ø"/>
+            </a:pPr>
+            <a:r>
+              <a:rPr lang="en-US" sz="1600" dirty="0">
+                <a:latin typeface="RobotoRegular"/>
+              </a:rPr>
+              <a:t>States &amp; City Wise Seat Booking.</a:t>
+            </a:r>
+          </a:p>
+          <a:p>
+            <a:pPr algn="just">
+              <a:lnSpc>
+                <a:spcPct val="150000"/>
+              </a:lnSpc>
+              <a:buFont typeface="Wingdings" panose="05000000000000000000" pitchFamily="2" charset="2"/>
+              <a:buChar char="Ø"/>
+            </a:pPr>
+            <a:r>
+              <a:rPr lang="en-US" sz="1600" dirty="0">
+                <a:latin typeface="RobotoRegular"/>
+              </a:rPr>
+              <a:t>Seat Classes like (Royal, Royal </a:t>
+            </a:r>
+            <a:r>
+              <a:rPr lang="en-US" sz="1600" dirty="0" err="1">
+                <a:latin typeface="RobotoRegular"/>
+              </a:rPr>
+              <a:t>Reclainer</a:t>
+            </a:r>
+            <a:r>
+              <a:rPr lang="en-US" sz="1600" dirty="0">
+                <a:latin typeface="RobotoRegular"/>
+              </a:rPr>
+              <a:t>, Club)</a:t>
             </a:r>
             <a:endParaRPr lang="en-IN" sz="1600" dirty="0">
               <a:latin typeface="RobotoRegular"/>
@@ -6229,7 +6448,31 @@
               <a:rPr lang="en-US" sz="1200" dirty="0">
                 <a:latin typeface="RobotoRegular"/>
               </a:rPr>
-              <a:t>Font Owsome Properties</a:t>
+              <a:t>Font </a:t>
+            </a:r>
+            <a:r>
+              <a:rPr lang="en-US" sz="1200" dirty="0" err="1">
+                <a:latin typeface="RobotoRegular"/>
+              </a:rPr>
+              <a:t>Owsome</a:t>
+            </a:r>
+            <a:r>
+              <a:rPr lang="en-US" sz="1200" dirty="0">
+                <a:latin typeface="RobotoRegular"/>
+              </a:rPr>
+              <a:t> Properties</a:t>
+            </a:r>
+          </a:p>
+          <a:p>
+            <a:pPr>
+              <a:buFont typeface="Wingdings" panose="05000000000000000000" pitchFamily="2" charset="2"/>
+              <a:buChar char="Ø"/>
+            </a:pPr>
+            <a:r>
+              <a:rPr lang="en-US" sz="1200" dirty="0">
+                <a:latin typeface="RobotoRegular"/>
+              </a:rPr>
+              <a:t>Sweet Alert Libraries</a:t>
             </a:r>
           </a:p>
           <a:p>
